--- a/Evaluation & Docs/Final Presentation.pptx
+++ b/Evaluation & Docs/Final Presentation.pptx
@@ -6111,13 +6111,13 @@
               </a:spcAft>
             </a:pPr>
             <a:r>
-              <a:rPr sz="1500">
+              <a:rPr sz="1400">
                 <a:solidFill>
                   <a:srgbClr val="222833"/>
                 </a:solidFill>
                 <a:latin typeface="Calibri"/>
               </a:rPr>
-              <a:t>▪  Retrain on a much larger database once IT/data-access constraints are lifted.</a:t>
+              <a:t>▪  Retrain on a much larger database once IT/data-access constraints are lifted, and unfreeze more of the backbone (today's last-block-only fine-tuning is a dataset-size-driven choice, not a ceiling).</a:t>
             </a:r>
           </a:p>
           <a:p>
@@ -6130,7 +6130,7 @@
               </a:spcAft>
             </a:pPr>
             <a:r>
-              <a:rPr sz="1500">
+              <a:rPr sz="1400">
                 <a:solidFill>
                   <a:srgbClr val="222833"/>
                 </a:solidFill>
@@ -6149,7 +6149,7 @@
               </a:spcAft>
             </a:pPr>
             <a:r>
-              <a:rPr sz="1500">
+              <a:rPr sz="1400">
                 <a:solidFill>
                   <a:srgbClr val="222833"/>
                 </a:solidFill>
@@ -6168,7 +6168,7 @@
               </a:spcAft>
             </a:pPr>
             <a:r>
-              <a:rPr sz="1500">
+              <a:rPr sz="1400">
                 <a:solidFill>
                   <a:srgbClr val="222833"/>
                 </a:solidFill>
@@ -6187,7 +6187,7 @@
               </a:spcAft>
             </a:pPr>
             <a:r>
-              <a:rPr sz="1500">
+              <a:rPr sz="1400">
                 <a:solidFill>
                   <a:srgbClr val="222833"/>
                 </a:solidFill>
@@ -8971,7 +8971,26 @@
                 </a:solidFill>
                 <a:latin typeface="Calibri"/>
               </a:rPr>
-              <a:t>▪  Model: MobileNetV2 (ImageNet-pretrained), last block fine-tuned, rest frozen — transfer learning, not training from scratch (§1.1).</a:t>
+              <a:t>▪  Model: MobileNetV2 (52 conv layers, ImageNet-pretrained) — transfer learning, not training from scratch (§1.1).</a:t>
+            </a:r>
+          </a:p>
+          <a:p>
+            <a:pPr>
+              <a:lnSpc>
+                <a:spcPct val="115000"/>
+              </a:lnSpc>
+              <a:spcAft>
+                <a:spcPts val="800"/>
+              </a:spcAft>
+            </a:pPr>
+            <a:r>
+              <a:rPr sz="1500">
+                <a:solidFill>
+                  <a:srgbClr val="5A6370"/>
+                </a:solidFill>
+                <a:latin typeface="Calibri"/>
+              </a:rPr>
+              <a:t>    – Only the last block + new classifier are unfrozen; the rest stays at pretrained weights — 176 images can't support fully fine-tuning 3.4M parameters without overfitting. A larger database would support unfreezing more (§16.3).</a:t>
             </a:r>
           </a:p>
           <a:p>

--- a/Evaluation & Docs/Final Presentation.pptx
+++ b/Evaluation & Docs/Final Presentation.pptx
@@ -3283,7 +3283,7 @@
                 </a:solidFill>
                 <a:latin typeface="Calibri"/>
               </a:rPr>
-              <a:t>Code: github.com/yaronconroy-del/picture-recognition-gypsum  (private — access arranged on request)</a:t>
+              <a:t>Code: github.com/yaronconroy-del/picture-recognition-gypsum</a:t>
             </a:r>
           </a:p>
         </p:txBody>

--- a/Evaluation & Docs/Final Presentation.pptx
+++ b/Evaluation & Docs/Final Presentation.pptx
@@ -22,6 +22,8 @@
     <p:sldId id="270" r:id="rId21"/>
     <p:sldId id="271" r:id="rId22"/>
     <p:sldId id="272" r:id="rId23"/>
+    <p:sldId id="273" r:id="rId24"/>
+    <p:sldId id="274" r:id="rId25"/>
   </p:sldIdLst>
   <p:sldSz cx="12191695" cy="6858000" type="screen4x3"/>
   <p:notesSz cx="6858000" cy="9144000"/>
@@ -6282,6 +6284,1165 @@
     <p:bg>
       <p:bgPr>
         <a:solidFill>
+          <a:srgbClr val="FFFFFF"/>
+        </a:solidFill>
+        <a:effectLst/>
+      </p:bgPr>
+    </p:bg>
+    <p:spTree>
+      <p:nvGrpSpPr>
+        <p:cNvPr id="1" name=""/>
+        <p:cNvGrpSpPr/>
+        <p:nvPr/>
+      </p:nvGrpSpPr>
+      <p:grpSpPr/>
+      <p:sp>
+        <p:nvSpPr>
+          <p:cNvPr id="2" name="TextBox 1"/>
+          <p:cNvSpPr txBox="1"/>
+          <p:nvPr/>
+        </p:nvSpPr>
+        <p:spPr>
+          <a:xfrm>
+            <a:off x="548640" y="292608"/>
+            <a:ext cx="10515600" cy="320040"/>
+          </a:xfrm>
+          <a:prstGeom prst="rect">
+            <a:avLst/>
+          </a:prstGeom>
+          <a:noFill/>
+        </p:spPr>
+        <p:txBody>
+          <a:bodyPr wrap="square">
+            <a:spAutoFit/>
+          </a:bodyPr>
+          <a:lstStyle/>
+          <a:p>
+            <a:pPr algn="l"/>
+            <a:r>
+              <a:rPr sz="1300" b="1" i="0">
+                <a:solidFill>
+                  <a:srgbClr val="2D6CDF"/>
+                </a:solidFill>
+                <a:latin typeface="Calibri"/>
+              </a:rPr>
+              <a:t>ADDENDUM — 2026-09-23</a:t>
+            </a:r>
+          </a:p>
+        </p:txBody>
+      </p:sp>
+      <p:sp>
+        <p:nvSpPr>
+          <p:cNvPr id="3" name="TextBox 2"/>
+          <p:cNvSpPr txBox="1"/>
+          <p:nvPr/>
+        </p:nvSpPr>
+        <p:spPr>
+          <a:xfrm>
+            <a:off x="548640" y="566928"/>
+            <a:ext cx="11155680" cy="822960"/>
+          </a:xfrm>
+          <a:prstGeom prst="rect">
+            <a:avLst/>
+          </a:prstGeom>
+          <a:noFill/>
+        </p:spPr>
+        <p:txBody>
+          <a:bodyPr wrap="square">
+            <a:spAutoFit/>
+          </a:bodyPr>
+          <a:lstStyle/>
+          <a:p>
+            <a:pPr algn="l"/>
+            <a:r>
+              <a:rPr sz="3000" b="1" i="0">
+                <a:solidFill>
+                  <a:srgbClr val="141E30"/>
+                </a:solidFill>
+                <a:latin typeface="Calibri"/>
+              </a:rPr>
+              <a:t>Robustness Check: Day/Night Mislabel Review</a:t>
+            </a:r>
+          </a:p>
+        </p:txBody>
+      </p:sp>
+      <p:sp>
+        <p:nvSpPr>
+          <p:cNvPr id="4" name="Rectangle 3"/>
+          <p:cNvSpPr/>
+          <p:nvPr/>
+        </p:nvSpPr>
+        <p:spPr>
+          <a:xfrm>
+            <a:off x="566928" y="1170432"/>
+            <a:ext cx="1280160" cy="38100"/>
+          </a:xfrm>
+          <a:prstGeom prst="rect">
+            <a:avLst/>
+          </a:prstGeom>
+          <a:solidFill>
+            <a:srgbClr val="2D6CDF"/>
+          </a:solidFill>
+          <a:ln>
+            <a:noFill/>
+          </a:ln>
+        </p:spPr>
+        <p:style>
+          <a:lnRef idx="1">
+            <a:schemeClr val="accent1"/>
+          </a:lnRef>
+          <a:fillRef idx="3">
+            <a:schemeClr val="accent1"/>
+          </a:fillRef>
+          <a:effectRef idx="2">
+            <a:schemeClr val="accent1"/>
+          </a:effectRef>
+          <a:fontRef idx="minor">
+            <a:schemeClr val="lt1"/>
+          </a:fontRef>
+        </p:style>
+        <p:txBody>
+          <a:bodyPr rtlCol="0" anchor="ctr"/>
+          <a:lstStyle/>
+          <a:p>
+            <a:pPr algn="ctr"/>
+          </a:p>
+        </p:txBody>
+      </p:sp>
+      <p:sp>
+        <p:nvSpPr>
+          <p:cNvPr id="5" name="TextBox 4"/>
+          <p:cNvSpPr txBox="1"/>
+          <p:nvPr/>
+        </p:nvSpPr>
+        <p:spPr>
+          <a:xfrm>
+            <a:off x="640080" y="1417320"/>
+            <a:ext cx="10789920" cy="1463040"/>
+          </a:xfrm>
+          <a:prstGeom prst="rect">
+            <a:avLst/>
+          </a:prstGeom>
+          <a:noFill/>
+        </p:spPr>
+        <p:txBody>
+          <a:bodyPr wrap="square">
+            <a:spAutoFit/>
+          </a:bodyPr>
+          <a:lstStyle/>
+          <a:p>
+            <a:pPr>
+              <a:lnSpc>
+                <a:spcPct val="115000"/>
+              </a:lnSpc>
+              <a:spcAft>
+                <a:spcPts val="800"/>
+              </a:spcAft>
+            </a:pPr>
+            <a:r>
+              <a:rPr sz="1500">
+                <a:solidFill>
+                  <a:srgbClr val="222833"/>
+                </a:solidFill>
+                <a:latin typeface="Calibri"/>
+              </a:rPr>
+              <a:t>▪  Every one of 168 day/night photos manually reviewed at full resolution against the one reliable visual cue (night's sharp floodlight glare vs. day's flatter diffuse haze).</a:t>
+            </a:r>
+          </a:p>
+          <a:p>
+            <a:pPr>
+              <a:lnSpc>
+                <a:spcPct val="115000"/>
+              </a:lnSpc>
+              <a:spcAft>
+                <a:spcPts val="800"/>
+              </a:spcAft>
+            </a:pPr>
+            <a:r>
+              <a:rPr sz="1500">
+                <a:solidFill>
+                  <a:srgbClr val="222833"/>
+                </a:solidFill>
+                <a:latin typeface="Calibri"/>
+              </a:rPr>
+              <a:t>▪  Only 1 confident mismatch found: a valid_night photo with no floodlight glare anywhere — moved to valid_day. Everything else that looked suspicious at thumbnail scale held up once zoomed in.</a:t>
+            </a:r>
+          </a:p>
+        </p:txBody>
+      </p:sp>
+      <p:graphicFrame>
+        <p:nvGraphicFramePr>
+          <p:cNvPr id="6" name="Table 5"/>
+          <p:cNvGraphicFramePr>
+            <a:graphicFrameLocks noGrp="1"/>
+          </p:cNvGraphicFramePr>
+          <p:nvPr/>
+        </p:nvGraphicFramePr>
+        <p:xfrm>
+          <a:off x="640080" y="3063240"/>
+          <a:ext cx="10881360" cy="2103120"/>
+        </p:xfrm>
+        <a:graphic>
+          <a:graphicData uri="http://schemas.openxmlformats.org/drawingml/2006/table">
+            <a:tbl>
+              <a:tblPr firstRow="1" bandRow="1">
+                <a:tableStyleId>{5C22544A-7EE6-4342-B048-85BDC9FD1C3A}</a:tableStyleId>
+              </a:tblPr>
+              <a:tblGrid>
+                <a:gridCol w="2743200"/>
+                <a:gridCol w="2011680"/>
+                <a:gridCol w="2011680"/>
+                <a:gridCol w="2011680"/>
+                <a:gridCol w="2103120"/>
+              </a:tblGrid>
+              <a:tr h="420624">
+                <a:tc>
+                  <a:txBody>
+                    <a:bodyPr/>
+                    <a:lstStyle/>
+                    <a:p>
+                      <a:pPr>
+                        <a:defRPr sz="1250" b="1">
+                          <a:solidFill>
+                            <a:srgbClr val="FFFFFF"/>
+                          </a:solidFill>
+                          <a:latin typeface="Calibri"/>
+                        </a:defRPr>
+                      </a:pPr>
+                      <a:r>
+                        <a:t>Config</a:t>
+                      </a:r>
+                    </a:p>
+                  </a:txBody>
+                  <a:tcPr anchor="ctr">
+                    <a:solidFill>
+                      <a:srgbClr val="141E30"/>
+                    </a:solidFill>
+                  </a:tcPr>
+                </a:tc>
+                <a:tc>
+                  <a:txBody>
+                    <a:bodyPr/>
+                    <a:lstStyle/>
+                    <a:p>
+                      <a:pPr>
+                        <a:defRPr sz="1250" b="1">
+                          <a:solidFill>
+                            <a:srgbClr val="FFFFFF"/>
+                          </a:solidFill>
+                          <a:latin typeface="Calibri"/>
+                        </a:defRPr>
+                      </a:pPr>
+                      <a:r>
+                        <a:t>Accuracy</a:t>
+                      </a:r>
+                    </a:p>
+                  </a:txBody>
+                  <a:tcPr anchor="ctr">
+                    <a:solidFill>
+                      <a:srgbClr val="141E30"/>
+                    </a:solidFill>
+                  </a:tcPr>
+                </a:tc>
+                <a:tc>
+                  <a:txBody>
+                    <a:bodyPr/>
+                    <a:lstStyle/>
+                    <a:p>
+                      <a:pPr>
+                        <a:defRPr sz="1250" b="1">
+                          <a:solidFill>
+                            <a:srgbClr val="FFFFFF"/>
+                          </a:solidFill>
+                          <a:latin typeface="Calibri"/>
+                        </a:defRPr>
+                      </a:pPr>
+                      <a:r>
+                        <a:t>ROC AUC</a:t>
+                      </a:r>
+                    </a:p>
+                  </a:txBody>
+                  <a:tcPr anchor="ctr">
+                    <a:solidFill>
+                      <a:srgbClr val="141E30"/>
+                    </a:solidFill>
+                  </a:tcPr>
+                </a:tc>
+                <a:tc>
+                  <a:txBody>
+                    <a:bodyPr/>
+                    <a:lstStyle/>
+                    <a:p>
+                      <a:pPr>
+                        <a:defRPr sz="1250" b="1">
+                          <a:solidFill>
+                            <a:srgbClr val="FFFFFF"/>
+                          </a:solidFill>
+                          <a:latin typeface="Calibri"/>
+                        </a:defRPr>
+                      </a:pPr>
+                      <a:r>
+                        <a:t>PR AP</a:t>
+                      </a:r>
+                    </a:p>
+                  </a:txBody>
+                  <a:tcPr anchor="ctr">
+                    <a:solidFill>
+                      <a:srgbClr val="141E30"/>
+                    </a:solidFill>
+                  </a:tcPr>
+                </a:tc>
+                <a:tc>
+                  <a:txBody>
+                    <a:bodyPr/>
+                    <a:lstStyle/>
+                    <a:p>
+                      <a:pPr>
+                        <a:defRPr sz="1250" b="1">
+                          <a:solidFill>
+                            <a:srgbClr val="FFFFFF"/>
+                          </a:solidFill>
+                          <a:latin typeface="Calibri"/>
+                        </a:defRPr>
+                      </a:pPr>
+                      <a:r>
+                        <a:t>F1-threshold</a:t>
+                      </a:r>
+                    </a:p>
+                  </a:txBody>
+                  <a:tcPr anchor="ctr">
+                    <a:solidFill>
+                      <a:srgbClr val="141E30"/>
+                    </a:solidFill>
+                  </a:tcPr>
+                </a:tc>
+              </a:tr>
+              <a:tr h="420624">
+                <a:tc>
+                  <a:txBody>
+                    <a:bodyPr/>
+                    <a:lstStyle/>
+                    <a:p>
+                      <a:pPr>
+                        <a:defRPr sz="1250" b="0">
+                          <a:solidFill>
+                            <a:srgbClr val="222833"/>
+                          </a:solidFill>
+                          <a:latin typeface="Calibri"/>
+                        </a:defRPr>
+                      </a:pPr>
+                      <a:r>
+                        <a:t>extended_70_30</a:t>
+                      </a:r>
+                    </a:p>
+                  </a:txBody>
+                  <a:tcPr anchor="ctr"/>
+                </a:tc>
+                <a:tc>
+                  <a:txBody>
+                    <a:bodyPr/>
+                    <a:lstStyle/>
+                    <a:p>
+                      <a:pPr>
+                        <a:defRPr sz="1250" b="0">
+                          <a:solidFill>
+                            <a:srgbClr val="222833"/>
+                          </a:solidFill>
+                          <a:latin typeface="Calibri"/>
+                        </a:defRPr>
+                      </a:pPr>
+                      <a:r>
+                        <a:t>0.648 → 0.717</a:t>
+                      </a:r>
+                    </a:p>
+                  </a:txBody>
+                  <a:tcPr anchor="ctr"/>
+                </a:tc>
+                <a:tc>
+                  <a:txBody>
+                    <a:bodyPr/>
+                    <a:lstStyle/>
+                    <a:p>
+                      <a:pPr>
+                        <a:defRPr sz="1250" b="0">
+                          <a:solidFill>
+                            <a:srgbClr val="222833"/>
+                          </a:solidFill>
+                          <a:latin typeface="Calibri"/>
+                        </a:defRPr>
+                      </a:pPr>
+                      <a:r>
+                        <a:t>0.857 → 0.854</a:t>
+                      </a:r>
+                    </a:p>
+                  </a:txBody>
+                  <a:tcPr anchor="ctr"/>
+                </a:tc>
+                <a:tc>
+                  <a:txBody>
+                    <a:bodyPr/>
+                    <a:lstStyle/>
+                    <a:p>
+                      <a:pPr>
+                        <a:defRPr sz="1250" b="0">
+                          <a:solidFill>
+                            <a:srgbClr val="222833"/>
+                          </a:solidFill>
+                          <a:latin typeface="Calibri"/>
+                        </a:defRPr>
+                      </a:pPr>
+                      <a:r>
+                        <a:t>0.691 → 0.726</a:t>
+                      </a:r>
+                    </a:p>
+                  </a:txBody>
+                  <a:tcPr anchor="ctr"/>
+                </a:tc>
+                <a:tc>
+                  <a:txBody>
+                    <a:bodyPr/>
+                    <a:lstStyle/>
+                    <a:p>
+                      <a:pPr>
+                        <a:defRPr sz="1250" b="0">
+                          <a:solidFill>
+                            <a:srgbClr val="222833"/>
+                          </a:solidFill>
+                          <a:latin typeface="Calibri"/>
+                        </a:defRPr>
+                      </a:pPr>
+                      <a:r>
+                        <a:t>0.592 → 0.308</a:t>
+                      </a:r>
+                    </a:p>
+                  </a:txBody>
+                  <a:tcPr anchor="ctr"/>
+                </a:tc>
+              </a:tr>
+              <a:tr h="420624">
+                <a:tc>
+                  <a:txBody>
+                    <a:bodyPr/>
+                    <a:lstStyle/>
+                    <a:p>
+                      <a:pPr>
+                        <a:defRPr sz="1250" b="0">
+                          <a:solidFill>
+                            <a:srgbClr val="222833"/>
+                          </a:solidFill>
+                          <a:latin typeface="Calibri"/>
+                        </a:defRPr>
+                      </a:pPr>
+                      <a:r>
+                        <a:t>split_70_30</a:t>
+                      </a:r>
+                    </a:p>
+                  </a:txBody>
+                  <a:tcPr anchor="ctr"/>
+                </a:tc>
+                <a:tc>
+                  <a:txBody>
+                    <a:bodyPr/>
+                    <a:lstStyle/>
+                    <a:p>
+                      <a:pPr>
+                        <a:defRPr sz="1250" b="0">
+                          <a:solidFill>
+                            <a:srgbClr val="222833"/>
+                          </a:solidFill>
+                          <a:latin typeface="Calibri"/>
+                        </a:defRPr>
+                      </a:pPr>
+                      <a:r>
+                        <a:t>0.764 → 0.759</a:t>
+                      </a:r>
+                    </a:p>
+                  </a:txBody>
+                  <a:tcPr anchor="ctr"/>
+                </a:tc>
+                <a:tc>
+                  <a:txBody>
+                    <a:bodyPr/>
+                    <a:lstStyle/>
+                    <a:p>
+                      <a:pPr>
+                        <a:defRPr sz="1250" b="0">
+                          <a:solidFill>
+                            <a:srgbClr val="222833"/>
+                          </a:solidFill>
+                          <a:latin typeface="Calibri"/>
+                        </a:defRPr>
+                      </a:pPr>
+                      <a:r>
+                        <a:t>0.861 → 0.844</a:t>
+                      </a:r>
+                    </a:p>
+                  </a:txBody>
+                  <a:tcPr anchor="ctr"/>
+                </a:tc>
+                <a:tc>
+                  <a:txBody>
+                    <a:bodyPr/>
+                    <a:lstStyle/>
+                    <a:p>
+                      <a:pPr>
+                        <a:defRPr sz="1250" b="0">
+                          <a:solidFill>
+                            <a:srgbClr val="222833"/>
+                          </a:solidFill>
+                          <a:latin typeface="Calibri"/>
+                        </a:defRPr>
+                      </a:pPr>
+                      <a:r>
+                        <a:t>0.739 → 0.742</a:t>
+                      </a:r>
+                    </a:p>
+                  </a:txBody>
+                  <a:tcPr anchor="ctr"/>
+                </a:tc>
+                <a:tc>
+                  <a:txBody>
+                    <a:bodyPr/>
+                    <a:lstStyle/>
+                    <a:p>
+                      <a:pPr>
+                        <a:defRPr sz="1250" b="0">
+                          <a:solidFill>
+                            <a:srgbClr val="222833"/>
+                          </a:solidFill>
+                          <a:latin typeface="Calibri"/>
+                        </a:defRPr>
+                      </a:pPr>
+                      <a:r>
+                        <a:t>0.435 → 0.481</a:t>
+                      </a:r>
+                    </a:p>
+                  </a:txBody>
+                  <a:tcPr anchor="ctr"/>
+                </a:tc>
+              </a:tr>
+              <a:tr h="420624">
+                <a:tc>
+                  <a:txBody>
+                    <a:bodyPr/>
+                    <a:lstStyle/>
+                    <a:p>
+                      <a:pPr>
+                        <a:defRPr sz="1250" b="0">
+                          <a:solidFill>
+                            <a:srgbClr val="222833"/>
+                          </a:solidFill>
+                          <a:latin typeface="Calibri"/>
+                        </a:defRPr>
+                      </a:pPr>
+                      <a:r>
+                        <a:t>extended_cv</a:t>
+                      </a:r>
+                    </a:p>
+                  </a:txBody>
+                  <a:tcPr anchor="ctr"/>
+                </a:tc>
+                <a:tc>
+                  <a:txBody>
+                    <a:bodyPr/>
+                    <a:lstStyle/>
+                    <a:p>
+                      <a:pPr>
+                        <a:defRPr sz="1250" b="0">
+                          <a:solidFill>
+                            <a:srgbClr val="222833"/>
+                          </a:solidFill>
+                          <a:latin typeface="Calibri"/>
+                        </a:defRPr>
+                      </a:pPr>
+                      <a:r>
+                        <a:t>0.723 → 0.693</a:t>
+                      </a:r>
+                    </a:p>
+                  </a:txBody>
+                  <a:tcPr anchor="ctr"/>
+                </a:tc>
+                <a:tc>
+                  <a:txBody>
+                    <a:bodyPr/>
+                    <a:lstStyle/>
+                    <a:p>
+                      <a:pPr>
+                        <a:defRPr sz="1250" b="0">
+                          <a:solidFill>
+                            <a:srgbClr val="222833"/>
+                          </a:solidFill>
+                          <a:latin typeface="Calibri"/>
+                        </a:defRPr>
+                      </a:pPr>
+                      <a:r>
+                        <a:t>0.837 → 0.806</a:t>
+                      </a:r>
+                    </a:p>
+                  </a:txBody>
+                  <a:tcPr anchor="ctr"/>
+                </a:tc>
+                <a:tc>
+                  <a:txBody>
+                    <a:bodyPr/>
+                    <a:lstStyle/>
+                    <a:p>
+                      <a:pPr>
+                        <a:defRPr sz="1250" b="0">
+                          <a:solidFill>
+                            <a:srgbClr val="222833"/>
+                          </a:solidFill>
+                          <a:latin typeface="Calibri"/>
+                        </a:defRPr>
+                      </a:pPr>
+                      <a:r>
+                        <a:t>0.752 → 0.721</a:t>
+                      </a:r>
+                    </a:p>
+                  </a:txBody>
+                  <a:tcPr anchor="ctr"/>
+                </a:tc>
+                <a:tc>
+                  <a:txBody>
+                    <a:bodyPr/>
+                    <a:lstStyle/>
+                    <a:p>
+                      <a:pPr>
+                        <a:defRPr sz="1250" b="0">
+                          <a:solidFill>
+                            <a:srgbClr val="222833"/>
+                          </a:solidFill>
+                          <a:latin typeface="Calibri"/>
+                        </a:defRPr>
+                      </a:pPr>
+                      <a:r>
+                        <a:t>0.302 → 0.292</a:t>
+                      </a:r>
+                    </a:p>
+                  </a:txBody>
+                  <a:tcPr anchor="ctr"/>
+                </a:tc>
+              </a:tr>
+              <a:tr h="420624">
+                <a:tc>
+                  <a:txBody>
+                    <a:bodyPr/>
+                    <a:lstStyle/>
+                    <a:p>
+                      <a:pPr>
+                        <a:defRPr sz="1250" b="1">
+                          <a:solidFill>
+                            <a:srgbClr val="1F8A5B"/>
+                          </a:solidFill>
+                          <a:latin typeface="Calibri"/>
+                        </a:defRPr>
+                      </a:pPr>
+                      <a:r>
+                        <a:t>split_cv (promoted)</a:t>
+                      </a:r>
+                    </a:p>
+                  </a:txBody>
+                  <a:tcPr anchor="ctr">
+                    <a:solidFill>
+                      <a:srgbClr val="E6F6EC"/>
+                    </a:solidFill>
+                  </a:tcPr>
+                </a:tc>
+                <a:tc>
+                  <a:txBody>
+                    <a:bodyPr/>
+                    <a:lstStyle/>
+                    <a:p>
+                      <a:pPr>
+                        <a:defRPr sz="1250" b="1">
+                          <a:solidFill>
+                            <a:srgbClr val="1F8A5B"/>
+                          </a:solidFill>
+                          <a:latin typeface="Calibri"/>
+                        </a:defRPr>
+                      </a:pPr>
+                      <a:r>
+                        <a:t>0.774 → 0.791</a:t>
+                      </a:r>
+                    </a:p>
+                  </a:txBody>
+                  <a:tcPr anchor="ctr">
+                    <a:solidFill>
+                      <a:srgbClr val="E6F6EC"/>
+                    </a:solidFill>
+                  </a:tcPr>
+                </a:tc>
+                <a:tc>
+                  <a:txBody>
+                    <a:bodyPr/>
+                    <a:lstStyle/>
+                    <a:p>
+                      <a:pPr>
+                        <a:defRPr sz="1250" b="1">
+                          <a:solidFill>
+                            <a:srgbClr val="1F8A5B"/>
+                          </a:solidFill>
+                          <a:latin typeface="Calibri"/>
+                        </a:defRPr>
+                      </a:pPr>
+                      <a:r>
+                        <a:t>0.818 → 0.897</a:t>
+                      </a:r>
+                    </a:p>
+                  </a:txBody>
+                  <a:tcPr anchor="ctr">
+                    <a:solidFill>
+                      <a:srgbClr val="E6F6EC"/>
+                    </a:solidFill>
+                  </a:tcPr>
+                </a:tc>
+                <a:tc>
+                  <a:txBody>
+                    <a:bodyPr/>
+                    <a:lstStyle/>
+                    <a:p>
+                      <a:pPr>
+                        <a:defRPr sz="1250" b="1">
+                          <a:solidFill>
+                            <a:srgbClr val="1F8A5B"/>
+                          </a:solidFill>
+                          <a:latin typeface="Calibri"/>
+                        </a:defRPr>
+                      </a:pPr>
+                      <a:r>
+                        <a:t>0.768 → 0.865</a:t>
+                      </a:r>
+                    </a:p>
+                  </a:txBody>
+                  <a:tcPr anchor="ctr">
+                    <a:solidFill>
+                      <a:srgbClr val="E6F6EC"/>
+                    </a:solidFill>
+                  </a:tcPr>
+                </a:tc>
+                <a:tc>
+                  <a:txBody>
+                    <a:bodyPr/>
+                    <a:lstStyle/>
+                    <a:p>
+                      <a:pPr>
+                        <a:defRPr sz="1250" b="1">
+                          <a:solidFill>
+                            <a:srgbClr val="1F8A5B"/>
+                          </a:solidFill>
+                          <a:latin typeface="Calibri"/>
+                        </a:defRPr>
+                      </a:pPr>
+                      <a:r>
+                        <a:t>0.466 → 0.366</a:t>
+                      </a:r>
+                    </a:p>
+                  </a:txBody>
+                  <a:tcPr anchor="ctr">
+                    <a:solidFill>
+                      <a:srgbClr val="E6F6EC"/>
+                    </a:solidFill>
+                  </a:tcPr>
+                </a:tc>
+              </a:tr>
+            </a:tbl>
+          </a:graphicData>
+        </a:graphic>
+      </p:graphicFrame>
+      <p:sp>
+        <p:nvSpPr>
+          <p:cNvPr id="7" name="TextBox 6"/>
+          <p:cNvSpPr txBox="1"/>
+          <p:nvPr/>
+        </p:nvSpPr>
+        <p:spPr>
+          <a:xfrm>
+            <a:off x="640080" y="5394960"/>
+            <a:ext cx="10789920" cy="1005840"/>
+          </a:xfrm>
+          <a:prstGeom prst="rect">
+            <a:avLst/>
+          </a:prstGeom>
+          <a:noFill/>
+        </p:spPr>
+        <p:txBody>
+          <a:bodyPr wrap="square">
+            <a:spAutoFit/>
+          </a:bodyPr>
+          <a:lstStyle/>
+          <a:p>
+            <a:pPr>
+              <a:lnSpc>
+                <a:spcPct val="115000"/>
+              </a:lnSpc>
+              <a:spcAft>
+                <a:spcPts val="800"/>
+              </a:spcAft>
+            </a:pPr>
+            <a:r>
+              <a:rPr sz="1300">
+                <a:solidFill>
+                  <a:srgbClr val="222833"/>
+                </a:solidFill>
+                <a:latin typeface="Calibri"/>
+              </a:rPr>
+              <a:t>▪  Verdict: the promoted scheme (no-empty split) held up and improved on cross-validation (ROC AUC +0.079); extended moved slightly either way depending on config — exactly what 1 photo out of 176 should do. The §12 label-scheme decision is unchanged, and if anything reinforced.</a:t>
+            </a:r>
+          </a:p>
+        </p:txBody>
+      </p:sp>
+      <p:sp>
+        <p:nvSpPr>
+          <p:cNvPr id="8" name="TextBox 7"/>
+          <p:cNvSpPr txBox="1"/>
+          <p:nvPr/>
+        </p:nvSpPr>
+        <p:spPr>
+          <a:xfrm>
+            <a:off x="548640" y="6510528"/>
+            <a:ext cx="8229600" cy="274320"/>
+          </a:xfrm>
+          <a:prstGeom prst="rect">
+            <a:avLst/>
+          </a:prstGeom>
+          <a:noFill/>
+        </p:spPr>
+        <p:txBody>
+          <a:bodyPr wrap="square">
+            <a:spAutoFit/>
+          </a:bodyPr>
+          <a:lstStyle/>
+          <a:p>
+            <a:pPr algn="l"/>
+            <a:r>
+              <a:rPr sz="1000" b="0" i="0">
+                <a:solidFill>
+                  <a:srgbClr val="5A6370"/>
+                </a:solidFill>
+                <a:latin typeface="Calibri"/>
+              </a:rPr>
+              <a:t>Evaluation &amp; Docs/Project Workflow.md §17</a:t>
+            </a:r>
+          </a:p>
+        </p:txBody>
+      </p:sp>
+      <p:sp>
+        <p:nvSpPr>
+          <p:cNvPr id="9" name="TextBox 8"/>
+          <p:cNvSpPr txBox="1"/>
+          <p:nvPr/>
+        </p:nvSpPr>
+        <p:spPr>
+          <a:xfrm>
+            <a:off x="11521440" y="6510528"/>
+            <a:ext cx="457200" cy="274320"/>
+          </a:xfrm>
+          <a:prstGeom prst="rect">
+            <a:avLst/>
+          </a:prstGeom>
+          <a:noFill/>
+        </p:spPr>
+        <p:txBody>
+          <a:bodyPr wrap="square">
+            <a:spAutoFit/>
+          </a:bodyPr>
+          <a:lstStyle/>
+          <a:p>
+            <a:pPr algn="r"/>
+            <a:r>
+              <a:rPr sz="1000" b="0" i="0">
+                <a:solidFill>
+                  <a:srgbClr val="5A6370"/>
+                </a:solidFill>
+                <a:latin typeface="Calibri"/>
+              </a:rPr>
+              <a:t>17</a:t>
+            </a:r>
+          </a:p>
+        </p:txBody>
+      </p:sp>
+    </p:spTree>
+  </p:cSld>
+  <p:clrMapOvr>
+    <a:masterClrMapping/>
+  </p:clrMapOvr>
+</p:sld>
+</file>
+
+<file path=ppt/slides/slide18.xml><?xml version="1.0" encoding="utf-8"?>
+<p:sld xmlns:a="http://schemas.openxmlformats.org/drawingml/2006/main" xmlns:p="http://schemas.openxmlformats.org/presentationml/2006/main" xmlns:r="http://schemas.openxmlformats.org/officeDocument/2006/relationships">
+  <p:cSld>
+    <p:bg>
+      <p:bgPr>
+        <a:solidFill>
+          <a:srgbClr val="FFFFFF"/>
+        </a:solidFill>
+        <a:effectLst/>
+      </p:bgPr>
+    </p:bg>
+    <p:spTree>
+      <p:nvGrpSpPr>
+        <p:cNvPr id="1" name=""/>
+        <p:cNvGrpSpPr/>
+        <p:nvPr/>
+      </p:nvGrpSpPr>
+      <p:grpSpPr/>
+      <p:sp>
+        <p:nvSpPr>
+          <p:cNvPr id="2" name="TextBox 1"/>
+          <p:cNvSpPr txBox="1"/>
+          <p:nvPr/>
+        </p:nvSpPr>
+        <p:spPr>
+          <a:xfrm>
+            <a:off x="548640" y="292608"/>
+            <a:ext cx="10515600" cy="320040"/>
+          </a:xfrm>
+          <a:prstGeom prst="rect">
+            <a:avLst/>
+          </a:prstGeom>
+          <a:noFill/>
+        </p:spPr>
+        <p:txBody>
+          <a:bodyPr wrap="square">
+            <a:spAutoFit/>
+          </a:bodyPr>
+          <a:lstStyle/>
+          <a:p>
+            <a:pPr algn="l"/>
+            <a:r>
+              <a:rPr sz="1300" b="1" i="0">
+                <a:solidFill>
+                  <a:srgbClr val="2D6CDF"/>
+                </a:solidFill>
+                <a:latin typeface="Calibri"/>
+              </a:rPr>
+              <a:t>ADDENDUM — 2026-09-23</a:t>
+            </a:r>
+          </a:p>
+        </p:txBody>
+      </p:sp>
+      <p:sp>
+        <p:nvSpPr>
+          <p:cNvPr id="3" name="TextBox 2"/>
+          <p:cNvSpPr txBox="1"/>
+          <p:nvPr/>
+        </p:nvSpPr>
+        <p:spPr>
+          <a:xfrm>
+            <a:off x="548640" y="566928"/>
+            <a:ext cx="11155680" cy="822960"/>
+          </a:xfrm>
+          <a:prstGeom prst="rect">
+            <a:avLst/>
+          </a:prstGeom>
+          <a:noFill/>
+        </p:spPr>
+        <p:txBody>
+          <a:bodyPr wrap="square">
+            <a:spAutoFit/>
+          </a:bodyPr>
+          <a:lstStyle/>
+          <a:p>
+            <a:pPr algn="l"/>
+            <a:r>
+              <a:rPr sz="3000" b="1" i="0">
+                <a:solidFill>
+                  <a:srgbClr val="141E30"/>
+                </a:solidFill>
+                <a:latin typeface="Calibri"/>
+              </a:rPr>
+              <a:t>Corrected Model: Training Curves &amp; Confusion Matrix</a:t>
+            </a:r>
+          </a:p>
+        </p:txBody>
+      </p:sp>
+      <p:sp>
+        <p:nvSpPr>
+          <p:cNvPr id="4" name="Rectangle 3"/>
+          <p:cNvSpPr/>
+          <p:nvPr/>
+        </p:nvSpPr>
+        <p:spPr>
+          <a:xfrm>
+            <a:off x="566928" y="1170432"/>
+            <a:ext cx="1280160" cy="38100"/>
+          </a:xfrm>
+          <a:prstGeom prst="rect">
+            <a:avLst/>
+          </a:prstGeom>
+          <a:solidFill>
+            <a:srgbClr val="2D6CDF"/>
+          </a:solidFill>
+          <a:ln>
+            <a:noFill/>
+          </a:ln>
+        </p:spPr>
+        <p:style>
+          <a:lnRef idx="1">
+            <a:schemeClr val="accent1"/>
+          </a:lnRef>
+          <a:fillRef idx="3">
+            <a:schemeClr val="accent1"/>
+          </a:fillRef>
+          <a:effectRef idx="2">
+            <a:schemeClr val="accent1"/>
+          </a:effectRef>
+          <a:fontRef idx="minor">
+            <a:schemeClr val="lt1"/>
+          </a:fontRef>
+        </p:style>
+        <p:txBody>
+          <a:bodyPr rtlCol="0" anchor="ctr"/>
+          <a:lstStyle/>
+          <a:p>
+            <a:pPr algn="ctr"/>
+          </a:p>
+        </p:txBody>
+      </p:sp>
+      <p:sp>
+        <p:nvSpPr>
+          <p:cNvPr id="5" name="TextBox 4"/>
+          <p:cNvSpPr txBox="1"/>
+          <p:nvPr/>
+        </p:nvSpPr>
+        <p:spPr>
+          <a:xfrm>
+            <a:off x="640080" y="1371600"/>
+            <a:ext cx="10789920" cy="365760"/>
+          </a:xfrm>
+          <a:prstGeom prst="rect">
+            <a:avLst/>
+          </a:prstGeom>
+          <a:noFill/>
+        </p:spPr>
+        <p:txBody>
+          <a:bodyPr wrap="square">
+            <a:spAutoFit/>
+          </a:bodyPr>
+          <a:lstStyle/>
+          <a:p>
+            <a:pPr algn="l"/>
+            <a:r>
+              <a:rPr sz="1300" b="0" i="0">
+                <a:solidFill>
+                  <a:srgbClr val="5A6370"/>
+                </a:solidFill>
+                <a:latin typeface="Calibri"/>
+              </a:rPr>
+              <a:t>split_70_30 (the promoted no-empty-split model), retrained on the day/night-corrected data — loss, accuracy (train vs. val), and the test confusion matrix.</a:t>
+            </a:r>
+          </a:p>
+        </p:txBody>
+      </p:sp>
+      <p:pic>
+        <p:nvPicPr>
+          <p:cNvPr id="6" name="Picture 5" descr="result_split_70_30.png"/>
+          <p:cNvPicPr>
+            <a:picLocks noChangeAspect="1"/>
+          </p:cNvPicPr>
+          <p:nvPr/>
+        </p:nvPicPr>
+        <p:blipFill>
+          <a:blip r:embed="rId2"/>
+          <a:stretch>
+            <a:fillRect/>
+          </a:stretch>
+        </p:blipFill>
+        <p:spPr>
+          <a:xfrm>
+            <a:off x="457200" y="2557506"/>
+            <a:ext cx="11247120" cy="3114587"/>
+          </a:xfrm>
+          <a:prstGeom prst="rect">
+            <a:avLst/>
+          </a:prstGeom>
+        </p:spPr>
+      </p:pic>
+      <p:sp>
+        <p:nvSpPr>
+          <p:cNvPr id="7" name="TextBox 6"/>
+          <p:cNvSpPr txBox="1"/>
+          <p:nvPr/>
+        </p:nvSpPr>
+        <p:spPr>
+          <a:xfrm>
+            <a:off x="548640" y="6510528"/>
+            <a:ext cx="8229600" cy="274320"/>
+          </a:xfrm>
+          <a:prstGeom prst="rect">
+            <a:avLst/>
+          </a:prstGeom>
+          <a:noFill/>
+        </p:spPr>
+        <p:txBody>
+          <a:bodyPr wrap="square">
+            <a:spAutoFit/>
+          </a:bodyPr>
+          <a:lstStyle/>
+          <a:p>
+            <a:pPr algn="l"/>
+            <a:r>
+              <a:rPr sz="1000" b="0" i="0">
+                <a:solidFill>
+                  <a:srgbClr val="5A6370"/>
+                </a:solidFill>
+                <a:latin typeface="Calibri"/>
+              </a:rPr>
+              <a:t>Model &amp; Training/models/corrected_daynight/result_split_70_30.png</a:t>
+            </a:r>
+          </a:p>
+        </p:txBody>
+      </p:sp>
+      <p:sp>
+        <p:nvSpPr>
+          <p:cNvPr id="8" name="TextBox 7"/>
+          <p:cNvSpPr txBox="1"/>
+          <p:nvPr/>
+        </p:nvSpPr>
+        <p:spPr>
+          <a:xfrm>
+            <a:off x="11521440" y="6510528"/>
+            <a:ext cx="457200" cy="274320"/>
+          </a:xfrm>
+          <a:prstGeom prst="rect">
+            <a:avLst/>
+          </a:prstGeom>
+          <a:noFill/>
+        </p:spPr>
+        <p:txBody>
+          <a:bodyPr wrap="square">
+            <a:spAutoFit/>
+          </a:bodyPr>
+          <a:lstStyle/>
+          <a:p>
+            <a:pPr algn="r"/>
+            <a:r>
+              <a:rPr sz="1000" b="0" i="0">
+                <a:solidFill>
+                  <a:srgbClr val="5A6370"/>
+                </a:solidFill>
+                <a:latin typeface="Calibri"/>
+              </a:rPr>
+              <a:t>18</a:t>
+            </a:r>
+          </a:p>
+        </p:txBody>
+      </p:sp>
+    </p:spTree>
+  </p:cSld>
+  <p:clrMapOvr>
+    <a:masterClrMapping/>
+  </p:clrMapOvr>
+</p:sld>
+</file>
+
+<file path=ppt/slides/slide19.xml><?xml version="1.0" encoding="utf-8"?>
+<p:sld xmlns:a="http://schemas.openxmlformats.org/drawingml/2006/main" xmlns:p="http://schemas.openxmlformats.org/presentationml/2006/main" xmlns:r="http://schemas.openxmlformats.org/officeDocument/2006/relationships">
+  <p:cSld>
+    <p:bg>
+      <p:bgPr>
+        <a:solidFill>
           <a:srgbClr val="141E30"/>
         </a:solidFill>
         <a:effectLst/>
@@ -6429,7 +7590,7 @@
                 </a:solidFill>
                 <a:latin typeface="Calibri"/>
               </a:rPr>
-              <a:t>17</a:t>
+              <a:t>19</a:t>
             </a:r>
           </a:p>
         </p:txBody>
